--- a/10-plantas/01-steelmaking/05-capacitacion/MM-OLL-01/MM-OLL-01_Capacitacion_AMMX.pptx
+++ b/10-plantas/01-steelmaking/05-capacitacion/MM-OLL-01/MM-OLL-01_Capacitacion_AMMX.pptx
@@ -3583,7 +3583,7 @@
                 <a:ea typeface="Century Gothic" pitchFamily="34" charset="-122"/>
                 <a:cs typeface="Century Gothic" pitchFamily="34" charset="-120"/>
               </a:rPr>
-              <a:t>Para: S-24 Refractarista · S-08 Preparador de Ollas · S-09 Grúa de Colada · S-19 / S-22 · personal de reline · C-15</a:t>
+              <a:t>Para: S-24 Refractarista · S-08 Preparador de Ollas · S-09 Grúa de Colada · S-19 Mecánico · S-22 Técnico Hidráulico · S-23 Soldador · personal de reline · C-15</a:t>
             </a:r>
             <a:endParaRPr lang="en-US" sz="1100" dirty="0"/>
           </a:p>
@@ -18534,7 +18534,7 @@
                 <a:ea typeface="Calibri" pitchFamily="34" charset="-122"/>
                 <a:cs typeface="Calibri" pitchFamily="34" charset="-120"/>
               </a:rPr>
-              <a:t>Siguiente paso: OJT supervisado y evaluación práctica (TD-P07); registro en IMaS y DC-3/SIRCE. Validación: pendiente.</a:t>
+              <a:t>Siguiente paso: OJT supervisado y evaluación práctica (TD-P07); registro en IMaS y DC-3/SIRCE. Validación: visto bueno técnica, seguridad, laboral, diseño instruccional.</a:t>
             </a:r>
             <a:endParaRPr lang="en-US" sz="750" dirty="0"/>
           </a:p>
@@ -23808,7 +23808,7 @@
                 <a:ea typeface="Century Gothic" pitchFamily="34" charset="-122"/>
                 <a:cs typeface="Century Gothic" pitchFamily="34" charset="-120"/>
               </a:rPr>
-              <a:t>Once componentes; la válvula debe cerrar siempre</a:t>
+              <a:t>Componente clave: la válvula debe cerrar siempre</a:t>
             </a:r>
             <a:endParaRPr lang="en-US" sz="2400" dirty="0"/>
           </a:p>
